--- a/docs/quickguides/en/vans/pptx/03_Quick_Guide_oneSCM_Grundlagen_Navigation_und_Customer_Journey_EN.pptx
+++ b/docs/quickguides/en/vans/pptx/03_Quick_Guide_oneSCM_Grundlagen_Navigation_und_Customer_Journey_EN.pptx
@@ -1503,7 +1503,7 @@
                 <a:ea typeface="MB Corpo S Text Office" pitchFamily="34" charset="-122"/>
                 <a:cs typeface="MB Corpo S Text Office" pitchFamily="34" charset="-120"/>
               </a:rPr>
-              <a:t>This document is interactive – references to handbook chapters and systems are provided as links.</a:t>
+              <a:t>References to handbook chapters and systems are highlighted; e-mail addresses are provided as links.</a:t>
             </a:r>
             <a:endParaRPr lang="en-US" sz="900" dirty="0"/>
           </a:p>
@@ -3268,11 +3268,11 @@
         <p:spPr>
           <a:xfrm>
             <a:off x="201168" y="4242816"/>
-            <a:ext cx="4663440" cy="1170432"/>
+            <a:ext cx="4663440" cy="1316736"/>
           </a:xfrm>
           <a:prstGeom prst="roundRect">
             <a:avLst>
-              <a:gd name="adj" fmla="val 7813"/>
+              <a:gd name="adj" fmla="val 6944"/>
             </a:avLst>
           </a:prstGeom>
           <a:solidFill>
@@ -3336,7 +3336,7 @@
         <p:spPr>
           <a:xfrm>
             <a:off x="310896" y="4590288"/>
-            <a:ext cx="4480560" cy="768096"/>
+            <a:ext cx="4480560" cy="914400"/>
           </a:xfrm>
           <a:prstGeom prst="rect">
             <a:avLst/>
@@ -3406,7 +3406,7 @@
                 <a:ea typeface="MB Corpo S Text Office" pitchFamily="34" charset="-122"/>
                 <a:cs typeface="MB Corpo S Text Office" pitchFamily="34" charset="-120"/>
               </a:rPr>
-              <a:t>Browser zoom below 100 % hides columns; use the slider.</a:t>
+              <a:t>Wizards end uniformly with the step "Overview &amp; Confirmation"; market names appear in the language of the market settings (3.3, 3.9).</a:t>
             </a:r>
             <a:endParaRPr lang="en-US" sz="900" dirty="0"/>
           </a:p>
